--- a/sunum.pptx
+++ b/sunum.pptx
@@ -3248,7 +3248,7 @@
               </a:defRPr>
             </a:pPr>
             <a:r>
-              <a:t>Hazırlayan: Muhammet Emre Doğangün</a:t>
+              <a:t>Hazırlayan: Muhammet Emre Doğangün - 21360859048</a:t>
             </a:r>
           </a:p>
         </p:txBody>

--- a/sunum.pptx
+++ b/sunum.pptx
@@ -4315,7 +4315,7 @@
               </a:defRPr>
             </a:pPr>
             <a:r>
-              <a:t>Dette Temel Kolaylık:</a:t>
+              <a:t>Temel Kolaylıklar:</a:t>
             </a:r>
           </a:p>
           <a:p>
